--- a/ANN_Summer_2026.pptx
+++ b/ANN_Summer_2026.pptx
@@ -2090,6 +2090,13 @@
           </a:solidFill>
           <a:ln/>
         </p:spPr>
+        <p:txBody>
+          <a:bodyPr/>
+          <a:lstStyle/>
+          <a:p>
+            <a:endParaRPr lang="es-CO"/>
+          </a:p>
+        </p:txBody>
       </p:sp>
       <p:sp>
         <p:nvSpPr>
@@ -2112,6 +2119,13 @@
           </a:solidFill>
           <a:ln/>
         </p:spPr>
+        <p:txBody>
+          <a:bodyPr/>
+          <a:lstStyle/>
+          <a:p>
+            <a:endParaRPr lang="es-CO"/>
+          </a:p>
+        </p:txBody>
       </p:sp>
       <p:sp>
         <p:nvSpPr>
@@ -2134,6 +2148,13 @@
           </a:solidFill>
           <a:ln/>
         </p:spPr>
+        <p:txBody>
+          <a:bodyPr/>
+          <a:lstStyle/>
+          <a:p>
+            <a:endParaRPr lang="es-CO"/>
+          </a:p>
+        </p:txBody>
       </p:sp>
       <p:sp>
         <p:nvSpPr>
@@ -2154,6 +2175,13 @@
           </a:solidFill>
           <a:ln/>
         </p:spPr>
+        <p:txBody>
+          <a:bodyPr/>
+          <a:lstStyle/>
+          <a:p>
+            <a:endParaRPr lang="es-CO"/>
+          </a:p>
+        </p:txBody>
       </p:sp>
       <p:pic>
         <p:nvPicPr>
@@ -2341,6 +2369,13 @@
             <a:prstDash val="solid"/>
           </a:ln>
         </p:spPr>
+        <p:txBody>
+          <a:bodyPr/>
+          <a:lstStyle/>
+          <a:p>
+            <a:endParaRPr lang="es-CO"/>
+          </a:p>
+        </p:txBody>
       </p:sp>
       <p:sp>
         <p:nvSpPr>
@@ -2375,7 +2410,18 @@
                 <a:ea typeface="Calibri" pitchFamily="34" charset="-122"/>
                 <a:cs typeface="Calibri" pitchFamily="34" charset="-120"/>
               </a:rPr>
-              <a:t>Eng. Elec. Francisco Calderón</a:t>
+              <a:t>Eng. Elec. Francisco Calderón </a:t>
+            </a:r>
+            <a:r>
+              <a:rPr lang="en-US" sz="1600" b="1" dirty="0" err="1">
+                <a:solidFill>
+                  <a:srgbClr val="FFFFFF"/>
+                </a:solidFill>
+                <a:latin typeface="Calibri" pitchFamily="34" charset="0"/>
+                <a:ea typeface="Calibri" pitchFamily="34" charset="-122"/>
+                <a:cs typeface="Calibri" pitchFamily="34" charset="-120"/>
+              </a:rPr>
+              <a:t>Ph.D</a:t>
             </a:r>
             <a:endParaRPr lang="en-US" sz="1600" dirty="0"/>
           </a:p>
@@ -2648,6 +2694,13 @@
             </a:outerShdw>
           </a:effectLst>
         </p:spPr>
+        <p:txBody>
+          <a:bodyPr/>
+          <a:lstStyle/>
+          <a:p>
+            <a:endParaRPr lang="es-CO"/>
+          </a:p>
+        </p:txBody>
       </p:sp>
       <p:sp>
         <p:nvSpPr>
@@ -2733,6 +2786,13 @@
           </a:solidFill>
           <a:ln/>
         </p:spPr>
+        <p:txBody>
+          <a:bodyPr/>
+          <a:lstStyle/>
+          <a:p>
+            <a:endParaRPr lang="es-CO"/>
+          </a:p>
+        </p:txBody>
       </p:sp>
       <p:sp>
         <p:nvSpPr>
@@ -2801,6 +2861,13 @@
             </a:outerShdw>
           </a:effectLst>
         </p:spPr>
+        <p:txBody>
+          <a:bodyPr/>
+          <a:lstStyle/>
+          <a:p>
+            <a:endParaRPr lang="es-CO"/>
+          </a:p>
+        </p:txBody>
       </p:sp>
       <p:sp>
         <p:nvSpPr>
@@ -2886,6 +2953,13 @@
           </a:solidFill>
           <a:ln/>
         </p:spPr>
+        <p:txBody>
+          <a:bodyPr/>
+          <a:lstStyle/>
+          <a:p>
+            <a:endParaRPr lang="es-CO"/>
+          </a:p>
+        </p:txBody>
       </p:sp>
       <p:sp>
         <p:nvSpPr>
@@ -2954,6 +3028,13 @@
             </a:outerShdw>
           </a:effectLst>
         </p:spPr>
+        <p:txBody>
+          <a:bodyPr/>
+          <a:lstStyle/>
+          <a:p>
+            <a:endParaRPr lang="es-CO"/>
+          </a:p>
+        </p:txBody>
       </p:sp>
       <p:sp>
         <p:nvSpPr>
@@ -2987,6 +3068,7 @@
                 <a:latin typeface="Calibri" pitchFamily="34" charset="0"/>
                 <a:ea typeface="Calibri" pitchFamily="34" charset="-122"/>
                 <a:cs typeface="Calibri" pitchFamily="34" charset="-120"/>
+                <a:hlinkClick r:id="rId4"/>
               </a:rPr>
               <a:t>Función de activación</a:t>
             </a:r>
@@ -3039,6 +3121,13 @@
           </a:solidFill>
           <a:ln/>
         </p:spPr>
+        <p:txBody>
+          <a:bodyPr/>
+          <a:lstStyle/>
+          <a:p>
+            <a:endParaRPr lang="es-CO"/>
+          </a:p>
+        </p:txBody>
       </p:sp>
       <p:sp>
         <p:nvSpPr>
@@ -3107,6 +3196,13 @@
             </a:outerShdw>
           </a:effectLst>
         </p:spPr>
+        <p:txBody>
+          <a:bodyPr/>
+          <a:lstStyle/>
+          <a:p>
+            <a:endParaRPr lang="es-CO"/>
+          </a:p>
+        </p:txBody>
       </p:sp>
       <p:sp>
         <p:nvSpPr>
@@ -3129,11 +3225,8 @@
           <a:bodyPr wrap="square" lIns="0" tIns="0" rIns="0" bIns="0" rtlCol="0" anchor="ctr"/>
           <a:lstStyle/>
           <a:p>
-            <a:pPr marL="0" indent="0">
-              <a:buNone/>
-            </a:pPr>
-            <a:r>
-              <a:rPr lang="en-US" sz="1500" dirty="0">
+            <a:r>
+              <a:rPr lang="en-US" sz="1500" dirty="0" err="1">
                 <a:solidFill>
                   <a:srgbClr val="12333A"/>
                 </a:solidFill>
@@ -3141,7 +3234,29 @@
                 <a:ea typeface="Calibri" pitchFamily="34" charset="-122"/>
                 <a:cs typeface="Calibri" pitchFamily="34" charset="-120"/>
               </a:rPr>
-              <a:t>Learning rate</a:t>
+              <a:t>tasa</a:t>
+            </a:r>
+            <a:r>
+              <a:rPr lang="en-US" sz="1500" dirty="0">
+                <a:solidFill>
+                  <a:srgbClr val="12333A"/>
+                </a:solidFill>
+                <a:latin typeface="Calibri" pitchFamily="34" charset="0"/>
+                <a:ea typeface="Calibri" pitchFamily="34" charset="-122"/>
+                <a:cs typeface="Calibri" pitchFamily="34" charset="-120"/>
+              </a:rPr>
+              <a:t> de </a:t>
+            </a:r>
+            <a:r>
+              <a:rPr lang="en-US" sz="1500" dirty="0" err="1">
+                <a:solidFill>
+                  <a:srgbClr val="12333A"/>
+                </a:solidFill>
+                <a:latin typeface="Calibri" pitchFamily="34" charset="0"/>
+                <a:ea typeface="Calibri" pitchFamily="34" charset="-122"/>
+                <a:cs typeface="Calibri" pitchFamily="34" charset="-120"/>
+              </a:rPr>
+              <a:t>aprendizaje</a:t>
             </a:r>
             <a:endParaRPr lang="en-US" sz="1500" dirty="0"/>
           </a:p>
@@ -3192,6 +3307,13 @@
           </a:solidFill>
           <a:ln/>
         </p:spPr>
+        <p:txBody>
+          <a:bodyPr/>
+          <a:lstStyle/>
+          <a:p>
+            <a:endParaRPr lang="es-CO"/>
+          </a:p>
+        </p:txBody>
       </p:sp>
       <p:sp>
         <p:nvSpPr>
@@ -3260,6 +3382,13 @@
             </a:outerShdw>
           </a:effectLst>
         </p:spPr>
+        <p:txBody>
+          <a:bodyPr/>
+          <a:lstStyle/>
+          <a:p>
+            <a:endParaRPr lang="es-CO"/>
+          </a:p>
+        </p:txBody>
       </p:sp>
       <p:sp>
         <p:nvSpPr>
@@ -3345,6 +3474,13 @@
           </a:solidFill>
           <a:ln/>
         </p:spPr>
+        <p:txBody>
+          <a:bodyPr/>
+          <a:lstStyle/>
+          <a:p>
+            <a:endParaRPr lang="es-CO"/>
+          </a:p>
+        </p:txBody>
       </p:sp>
       <p:sp>
         <p:nvSpPr>
@@ -3514,6 +3650,13 @@
           </a:solidFill>
           <a:ln/>
         </p:spPr>
+        <p:txBody>
+          <a:bodyPr/>
+          <a:lstStyle/>
+          <a:p>
+            <a:endParaRPr lang="es-CO"/>
+          </a:p>
+        </p:txBody>
       </p:sp>
       <p:sp>
         <p:nvSpPr>
@@ -3534,6 +3677,13 @@
           </a:solidFill>
           <a:ln/>
         </p:spPr>
+        <p:txBody>
+          <a:bodyPr/>
+          <a:lstStyle/>
+          <a:p>
+            <a:endParaRPr lang="es-CO"/>
+          </a:p>
+        </p:txBody>
       </p:sp>
       <p:pic>
         <p:nvPicPr>
@@ -3697,6 +3847,13 @@
           </a:solidFill>
           <a:ln/>
         </p:spPr>
+        <p:txBody>
+          <a:bodyPr/>
+          <a:lstStyle/>
+          <a:p>
+            <a:endParaRPr lang="es-CO"/>
+          </a:p>
+        </p:txBody>
       </p:sp>
       <p:pic>
         <p:nvPicPr>
@@ -3754,6 +3911,7 @@
                 <a:latin typeface="Calibri" pitchFamily="34" charset="0"/>
                 <a:ea typeface="Calibri" pitchFamily="34" charset="-122"/>
                 <a:cs typeface="Calibri" pitchFamily="34" charset="-120"/>
+                <a:hlinkClick r:id="rId5"/>
               </a:rPr>
               <a:t>Ábrelo en Colab desde el repositorio de GitHub (badge 'Open in Colab')</a:t>
             </a:r>
@@ -3900,6 +4058,13 @@
             </a:outerShdw>
           </a:effectLst>
         </p:spPr>
+        <p:txBody>
+          <a:bodyPr/>
+          <a:lstStyle/>
+          <a:p>
+            <a:endParaRPr lang="es-CO"/>
+          </a:p>
+        </p:txBody>
       </p:sp>
       <p:sp>
         <p:nvSpPr>
@@ -3920,6 +4085,13 @@
           </a:solidFill>
           <a:ln/>
         </p:spPr>
+        <p:txBody>
+          <a:bodyPr/>
+          <a:lstStyle/>
+          <a:p>
+            <a:endParaRPr lang="es-CO"/>
+          </a:p>
+        </p:txBody>
       </p:sp>
       <p:pic>
         <p:nvPicPr>
@@ -4054,6 +4226,13 @@
             </a:outerShdw>
           </a:effectLst>
         </p:spPr>
+        <p:txBody>
+          <a:bodyPr/>
+          <a:lstStyle/>
+          <a:p>
+            <a:endParaRPr lang="es-CO"/>
+          </a:p>
+        </p:txBody>
       </p:sp>
       <p:sp>
         <p:nvSpPr>
@@ -4074,6 +4253,13 @@
           </a:solidFill>
           <a:ln/>
         </p:spPr>
+        <p:txBody>
+          <a:bodyPr/>
+          <a:lstStyle/>
+          <a:p>
+            <a:endParaRPr lang="es-CO"/>
+          </a:p>
+        </p:txBody>
       </p:sp>
       <p:pic>
         <p:nvPicPr>
@@ -4208,6 +4394,13 @@
             </a:outerShdw>
           </a:effectLst>
         </p:spPr>
+        <p:txBody>
+          <a:bodyPr/>
+          <a:lstStyle/>
+          <a:p>
+            <a:endParaRPr lang="es-CO"/>
+          </a:p>
+        </p:txBody>
       </p:sp>
       <p:sp>
         <p:nvSpPr>
@@ -4228,6 +4421,13 @@
           </a:solidFill>
           <a:ln/>
         </p:spPr>
+        <p:txBody>
+          <a:bodyPr/>
+          <a:lstStyle/>
+          <a:p>
+            <a:endParaRPr lang="es-CO"/>
+          </a:p>
+        </p:txBody>
       </p:sp>
       <p:pic>
         <p:nvPicPr>
@@ -4362,6 +4562,13 @@
             </a:outerShdw>
           </a:effectLst>
         </p:spPr>
+        <p:txBody>
+          <a:bodyPr/>
+          <a:lstStyle/>
+          <a:p>
+            <a:endParaRPr lang="es-CO"/>
+          </a:p>
+        </p:txBody>
       </p:sp>
       <p:sp>
         <p:nvSpPr>
@@ -4382,6 +4589,13 @@
           </a:solidFill>
           <a:ln/>
         </p:spPr>
+        <p:txBody>
+          <a:bodyPr/>
+          <a:lstStyle/>
+          <a:p>
+            <a:endParaRPr lang="es-CO"/>
+          </a:p>
+        </p:txBody>
       </p:sp>
       <p:pic>
         <p:nvPicPr>
@@ -4617,6 +4831,13 @@
           </a:solidFill>
           <a:ln/>
         </p:spPr>
+        <p:txBody>
+          <a:bodyPr/>
+          <a:lstStyle/>
+          <a:p>
+            <a:endParaRPr lang="es-CO"/>
+          </a:p>
+        </p:txBody>
       </p:sp>
       <p:sp>
         <p:nvSpPr>
@@ -4637,6 +4858,13 @@
           </a:solidFill>
           <a:ln/>
         </p:spPr>
+        <p:txBody>
+          <a:bodyPr/>
+          <a:lstStyle/>
+          <a:p>
+            <a:endParaRPr lang="es-CO"/>
+          </a:p>
+        </p:txBody>
       </p:sp>
       <p:pic>
         <p:nvPicPr>
@@ -4772,6 +5000,7 @@
                 <a:latin typeface="Calibri" pitchFamily="34" charset="0"/>
                 <a:ea typeface="Calibri" pitchFamily="34" charset="-122"/>
                 <a:cs typeface="Calibri" pitchFamily="34" charset="-120"/>
+                <a:hlinkClick r:id="rId4"/>
               </a:rPr>
               <a:t>Predecir un número: progresión de la diabetes a un año</a:t>
             </a:r>
@@ -4957,6 +5186,13 @@
             </a:outerShdw>
           </a:effectLst>
         </p:spPr>
+        <p:txBody>
+          <a:bodyPr/>
+          <a:lstStyle/>
+          <a:p>
+            <a:endParaRPr lang="es-CO"/>
+          </a:p>
+        </p:txBody>
       </p:sp>
       <p:sp>
         <p:nvSpPr>
@@ -4977,6 +5213,13 @@
           </a:solidFill>
           <a:ln/>
         </p:spPr>
+        <p:txBody>
+          <a:bodyPr/>
+          <a:lstStyle/>
+          <a:p>
+            <a:endParaRPr lang="es-CO"/>
+          </a:p>
+        </p:txBody>
       </p:sp>
       <p:pic>
         <p:nvPicPr>
@@ -5111,6 +5354,13 @@
             </a:outerShdw>
           </a:effectLst>
         </p:spPr>
+        <p:txBody>
+          <a:bodyPr/>
+          <a:lstStyle/>
+          <a:p>
+            <a:endParaRPr lang="es-CO"/>
+          </a:p>
+        </p:txBody>
       </p:sp>
       <p:sp>
         <p:nvSpPr>
@@ -5131,6 +5381,13 @@
           </a:solidFill>
           <a:ln/>
         </p:spPr>
+        <p:txBody>
+          <a:bodyPr/>
+          <a:lstStyle/>
+          <a:p>
+            <a:endParaRPr lang="es-CO"/>
+          </a:p>
+        </p:txBody>
       </p:sp>
       <p:pic>
         <p:nvPicPr>
@@ -5265,6 +5522,13 @@
             </a:outerShdw>
           </a:effectLst>
         </p:spPr>
+        <p:txBody>
+          <a:bodyPr/>
+          <a:lstStyle/>
+          <a:p>
+            <a:endParaRPr lang="es-CO"/>
+          </a:p>
+        </p:txBody>
       </p:sp>
       <p:sp>
         <p:nvSpPr>
@@ -5285,6 +5549,13 @@
           </a:solidFill>
           <a:ln/>
         </p:spPr>
+        <p:txBody>
+          <a:bodyPr/>
+          <a:lstStyle/>
+          <a:p>
+            <a:endParaRPr lang="es-CO"/>
+          </a:p>
+        </p:txBody>
       </p:sp>
       <p:pic>
         <p:nvPicPr>
@@ -5605,6 +5876,13 @@
             </a:outerShdw>
           </a:effectLst>
         </p:spPr>
+        <p:txBody>
+          <a:bodyPr/>
+          <a:lstStyle/>
+          <a:p>
+            <a:endParaRPr lang="es-CO"/>
+          </a:p>
+        </p:txBody>
       </p:sp>
       <p:sp>
         <p:nvSpPr>
@@ -5625,6 +5903,13 @@
           </a:solidFill>
           <a:ln/>
         </p:spPr>
+        <p:txBody>
+          <a:bodyPr/>
+          <a:lstStyle/>
+          <a:p>
+            <a:endParaRPr lang="es-CO"/>
+          </a:p>
+        </p:txBody>
       </p:sp>
       <p:pic>
         <p:nvPicPr>
@@ -5759,6 +6044,13 @@
             </a:outerShdw>
           </a:effectLst>
         </p:spPr>
+        <p:txBody>
+          <a:bodyPr/>
+          <a:lstStyle/>
+          <a:p>
+            <a:endParaRPr lang="es-CO"/>
+          </a:p>
+        </p:txBody>
       </p:sp>
       <p:sp>
         <p:nvSpPr>
@@ -5779,6 +6071,13 @@
           </a:solidFill>
           <a:ln/>
         </p:spPr>
+        <p:txBody>
+          <a:bodyPr/>
+          <a:lstStyle/>
+          <a:p>
+            <a:endParaRPr lang="es-CO"/>
+          </a:p>
+        </p:txBody>
       </p:sp>
       <p:pic>
         <p:nvPicPr>
@@ -5913,6 +6212,13 @@
             </a:outerShdw>
           </a:effectLst>
         </p:spPr>
+        <p:txBody>
+          <a:bodyPr/>
+          <a:lstStyle/>
+          <a:p>
+            <a:endParaRPr lang="es-CO"/>
+          </a:p>
+        </p:txBody>
       </p:sp>
       <p:sp>
         <p:nvSpPr>
@@ -5933,6 +6239,13 @@
           </a:solidFill>
           <a:ln/>
         </p:spPr>
+        <p:txBody>
+          <a:bodyPr/>
+          <a:lstStyle/>
+          <a:p>
+            <a:endParaRPr lang="es-CO"/>
+          </a:p>
+        </p:txBody>
       </p:sp>
       <p:pic>
         <p:nvPicPr>
@@ -6067,6 +6380,13 @@
             </a:outerShdw>
           </a:effectLst>
         </p:spPr>
+        <p:txBody>
+          <a:bodyPr/>
+          <a:lstStyle/>
+          <a:p>
+            <a:endParaRPr lang="es-CO"/>
+          </a:p>
+        </p:txBody>
       </p:sp>
       <p:sp>
         <p:nvSpPr>
@@ -6087,6 +6407,13 @@
           </a:solidFill>
           <a:ln/>
         </p:spPr>
+        <p:txBody>
+          <a:bodyPr/>
+          <a:lstStyle/>
+          <a:p>
+            <a:endParaRPr lang="es-CO"/>
+          </a:p>
+        </p:txBody>
       </p:sp>
       <p:pic>
         <p:nvPicPr>
@@ -6221,6 +6548,13 @@
             </a:outerShdw>
           </a:effectLst>
         </p:spPr>
+        <p:txBody>
+          <a:bodyPr/>
+          <a:lstStyle/>
+          <a:p>
+            <a:endParaRPr lang="es-CO"/>
+          </a:p>
+        </p:txBody>
       </p:sp>
       <p:sp>
         <p:nvSpPr>
@@ -6241,6 +6575,13 @@
           </a:solidFill>
           <a:ln/>
         </p:spPr>
+        <p:txBody>
+          <a:bodyPr/>
+          <a:lstStyle/>
+          <a:p>
+            <a:endParaRPr lang="es-CO"/>
+          </a:p>
+        </p:txBody>
       </p:sp>
       <p:pic>
         <p:nvPicPr>
@@ -6375,6 +6716,13 @@
             </a:outerShdw>
           </a:effectLst>
         </p:spPr>
+        <p:txBody>
+          <a:bodyPr/>
+          <a:lstStyle/>
+          <a:p>
+            <a:endParaRPr lang="es-CO"/>
+          </a:p>
+        </p:txBody>
       </p:sp>
       <p:sp>
         <p:nvSpPr>
@@ -6395,6 +6743,13 @@
           </a:solidFill>
           <a:ln/>
         </p:spPr>
+        <p:txBody>
+          <a:bodyPr/>
+          <a:lstStyle/>
+          <a:p>
+            <a:endParaRPr lang="es-CO"/>
+          </a:p>
+        </p:txBody>
       </p:sp>
       <p:pic>
         <p:nvPicPr>
@@ -6715,6 +7070,13 @@
             </a:outerShdw>
           </a:effectLst>
         </p:spPr>
+        <p:txBody>
+          <a:bodyPr/>
+          <a:lstStyle/>
+          <a:p>
+            <a:endParaRPr lang="es-CO"/>
+          </a:p>
+        </p:txBody>
       </p:sp>
       <p:sp>
         <p:nvSpPr>
@@ -6735,6 +7097,13 @@
           </a:solidFill>
           <a:ln/>
         </p:spPr>
+        <p:txBody>
+          <a:bodyPr/>
+          <a:lstStyle/>
+          <a:p>
+            <a:endParaRPr lang="es-CO"/>
+          </a:p>
+        </p:txBody>
       </p:sp>
       <p:pic>
         <p:nvPicPr>
@@ -6869,6 +7238,13 @@
             </a:outerShdw>
           </a:effectLst>
         </p:spPr>
+        <p:txBody>
+          <a:bodyPr/>
+          <a:lstStyle/>
+          <a:p>
+            <a:endParaRPr lang="es-CO"/>
+          </a:p>
+        </p:txBody>
       </p:sp>
       <p:sp>
         <p:nvSpPr>
@@ -6889,6 +7265,13 @@
           </a:solidFill>
           <a:ln/>
         </p:spPr>
+        <p:txBody>
+          <a:bodyPr/>
+          <a:lstStyle/>
+          <a:p>
+            <a:endParaRPr lang="es-CO"/>
+          </a:p>
+        </p:txBody>
       </p:sp>
       <p:pic>
         <p:nvPicPr>
@@ -7023,6 +7406,13 @@
             </a:outerShdw>
           </a:effectLst>
         </p:spPr>
+        <p:txBody>
+          <a:bodyPr/>
+          <a:lstStyle/>
+          <a:p>
+            <a:endParaRPr lang="es-CO"/>
+          </a:p>
+        </p:txBody>
       </p:sp>
       <p:sp>
         <p:nvSpPr>
@@ -7043,6 +7433,13 @@
           </a:solidFill>
           <a:ln/>
         </p:spPr>
+        <p:txBody>
+          <a:bodyPr/>
+          <a:lstStyle/>
+          <a:p>
+            <a:endParaRPr lang="es-CO"/>
+          </a:p>
+        </p:txBody>
       </p:sp>
       <p:pic>
         <p:nvPicPr>
@@ -7177,6 +7574,13 @@
             </a:outerShdw>
           </a:effectLst>
         </p:spPr>
+        <p:txBody>
+          <a:bodyPr/>
+          <a:lstStyle/>
+          <a:p>
+            <a:endParaRPr lang="es-CO"/>
+          </a:p>
+        </p:txBody>
       </p:sp>
       <p:sp>
         <p:nvSpPr>
@@ -7197,6 +7601,13 @@
           </a:solidFill>
           <a:ln/>
         </p:spPr>
+        <p:txBody>
+          <a:bodyPr/>
+          <a:lstStyle/>
+          <a:p>
+            <a:endParaRPr lang="es-CO"/>
+          </a:p>
+        </p:txBody>
       </p:sp>
       <p:pic>
         <p:nvPicPr>
@@ -7432,6 +7843,13 @@
           </a:solidFill>
           <a:ln/>
         </p:spPr>
+        <p:txBody>
+          <a:bodyPr/>
+          <a:lstStyle/>
+          <a:p>
+            <a:endParaRPr lang="es-CO"/>
+          </a:p>
+        </p:txBody>
       </p:sp>
       <p:sp>
         <p:nvSpPr>
@@ -7454,6 +7872,13 @@
           </a:solidFill>
           <a:ln/>
         </p:spPr>
+        <p:txBody>
+          <a:bodyPr/>
+          <a:lstStyle/>
+          <a:p>
+            <a:endParaRPr lang="es-CO"/>
+          </a:p>
+        </p:txBody>
       </p:sp>
       <p:sp>
         <p:nvSpPr>
@@ -7474,6 +7899,13 @@
           </a:solidFill>
           <a:ln/>
         </p:spPr>
+        <p:txBody>
+          <a:bodyPr/>
+          <a:lstStyle/>
+          <a:p>
+            <a:endParaRPr lang="es-CO"/>
+          </a:p>
+        </p:txBody>
       </p:sp>
       <p:pic>
         <p:nvPicPr>
@@ -7605,6 +8037,13 @@
             </a:outerShdw>
           </a:effectLst>
         </p:spPr>
+        <p:txBody>
+          <a:bodyPr/>
+          <a:lstStyle/>
+          <a:p>
+            <a:endParaRPr lang="es-CO"/>
+          </a:p>
+        </p:txBody>
       </p:sp>
       <p:sp>
         <p:nvSpPr>
@@ -7922,6 +8361,13 @@
             </a:outerShdw>
           </a:effectLst>
         </p:spPr>
+        <p:txBody>
+          <a:bodyPr/>
+          <a:lstStyle/>
+          <a:p>
+            <a:endParaRPr lang="es-CO"/>
+          </a:p>
+        </p:txBody>
       </p:sp>
       <p:sp>
         <p:nvSpPr>
@@ -7942,6 +8388,13 @@
           </a:solidFill>
           <a:ln/>
         </p:spPr>
+        <p:txBody>
+          <a:bodyPr/>
+          <a:lstStyle/>
+          <a:p>
+            <a:endParaRPr lang="es-CO"/>
+          </a:p>
+        </p:txBody>
       </p:sp>
       <p:pic>
         <p:nvPicPr>
@@ -8112,6 +8565,13 @@
             </a:outerShdw>
           </a:effectLst>
         </p:spPr>
+        <p:txBody>
+          <a:bodyPr/>
+          <a:lstStyle/>
+          <a:p>
+            <a:endParaRPr lang="es-CO"/>
+          </a:p>
+        </p:txBody>
       </p:sp>
       <p:sp>
         <p:nvSpPr>
@@ -8132,6 +8592,13 @@
           </a:solidFill>
           <a:ln/>
         </p:spPr>
+        <p:txBody>
+          <a:bodyPr/>
+          <a:lstStyle/>
+          <a:p>
+            <a:endParaRPr lang="es-CO"/>
+          </a:p>
+        </p:txBody>
       </p:sp>
       <p:pic>
         <p:nvPicPr>
@@ -8302,6 +8769,13 @@
             </a:outerShdw>
           </a:effectLst>
         </p:spPr>
+        <p:txBody>
+          <a:bodyPr/>
+          <a:lstStyle/>
+          <a:p>
+            <a:endParaRPr lang="es-CO"/>
+          </a:p>
+        </p:txBody>
       </p:sp>
       <p:sp>
         <p:nvSpPr>
@@ -8322,6 +8796,13 @@
           </a:solidFill>
           <a:ln/>
         </p:spPr>
+        <p:txBody>
+          <a:bodyPr/>
+          <a:lstStyle/>
+          <a:p>
+            <a:endParaRPr lang="es-CO"/>
+          </a:p>
+        </p:txBody>
       </p:sp>
       <p:pic>
         <p:nvPicPr>
@@ -8492,6 +8973,13 @@
             </a:outerShdw>
           </a:effectLst>
         </p:spPr>
+        <p:txBody>
+          <a:bodyPr/>
+          <a:lstStyle/>
+          <a:p>
+            <a:endParaRPr lang="es-CO"/>
+          </a:p>
+        </p:txBody>
       </p:sp>
       <p:sp>
         <p:nvSpPr>
@@ -8512,6 +9000,13 @@
           </a:solidFill>
           <a:ln/>
         </p:spPr>
+        <p:txBody>
+          <a:bodyPr/>
+          <a:lstStyle/>
+          <a:p>
+            <a:endParaRPr lang="es-CO"/>
+          </a:p>
+        </p:txBody>
       </p:sp>
       <p:pic>
         <p:nvPicPr>
@@ -8682,6 +9177,13 @@
             </a:outerShdw>
           </a:effectLst>
         </p:spPr>
+        <p:txBody>
+          <a:bodyPr/>
+          <a:lstStyle/>
+          <a:p>
+            <a:endParaRPr lang="es-CO"/>
+          </a:p>
+        </p:txBody>
       </p:sp>
       <p:sp>
         <p:nvSpPr>
@@ -8702,6 +9204,13 @@
           </a:solidFill>
           <a:ln/>
         </p:spPr>
+        <p:txBody>
+          <a:bodyPr/>
+          <a:lstStyle/>
+          <a:p>
+            <a:endParaRPr lang="es-CO"/>
+          </a:p>
+        </p:txBody>
       </p:sp>
       <p:pic>
         <p:nvPicPr>
@@ -9100,6 +9609,13 @@
             </a:outerShdw>
           </a:effectLst>
         </p:spPr>
+        <p:txBody>
+          <a:bodyPr/>
+          <a:lstStyle/>
+          <a:p>
+            <a:endParaRPr lang="es-CO"/>
+          </a:p>
+        </p:txBody>
       </p:sp>
       <p:sp>
         <p:nvSpPr>
@@ -9120,6 +9636,13 @@
           </a:solidFill>
           <a:ln/>
         </p:spPr>
+        <p:txBody>
+          <a:bodyPr/>
+          <a:lstStyle/>
+          <a:p>
+            <a:endParaRPr lang="es-CO"/>
+          </a:p>
+        </p:txBody>
       </p:sp>
       <p:pic>
         <p:nvPicPr>
@@ -9254,6 +9777,13 @@
             </a:outerShdw>
           </a:effectLst>
         </p:spPr>
+        <p:txBody>
+          <a:bodyPr/>
+          <a:lstStyle/>
+          <a:p>
+            <a:endParaRPr lang="es-CO"/>
+          </a:p>
+        </p:txBody>
       </p:sp>
       <p:sp>
         <p:nvSpPr>
@@ -9274,6 +9804,13 @@
           </a:solidFill>
           <a:ln/>
         </p:spPr>
+        <p:txBody>
+          <a:bodyPr/>
+          <a:lstStyle/>
+          <a:p>
+            <a:endParaRPr lang="es-CO"/>
+          </a:p>
+        </p:txBody>
       </p:sp>
       <p:pic>
         <p:nvPicPr>
@@ -9408,6 +9945,13 @@
             </a:outerShdw>
           </a:effectLst>
         </p:spPr>
+        <p:txBody>
+          <a:bodyPr/>
+          <a:lstStyle/>
+          <a:p>
+            <a:endParaRPr lang="es-CO"/>
+          </a:p>
+        </p:txBody>
       </p:sp>
       <p:sp>
         <p:nvSpPr>
@@ -9428,6 +9972,13 @@
           </a:solidFill>
           <a:ln/>
         </p:spPr>
+        <p:txBody>
+          <a:bodyPr/>
+          <a:lstStyle/>
+          <a:p>
+            <a:endParaRPr lang="es-CO"/>
+          </a:p>
+        </p:txBody>
       </p:sp>
       <p:pic>
         <p:nvPicPr>
@@ -9801,6 +10352,13 @@
           </a:solidFill>
           <a:ln/>
         </p:spPr>
+        <p:txBody>
+          <a:bodyPr/>
+          <a:lstStyle/>
+          <a:p>
+            <a:endParaRPr lang="es-CO"/>
+          </a:p>
+        </p:txBody>
       </p:sp>
       <p:pic>
         <p:nvPicPr>
@@ -9895,6 +10453,13 @@
           </a:solidFill>
           <a:ln/>
         </p:spPr>
+        <p:txBody>
+          <a:bodyPr/>
+          <a:lstStyle/>
+          <a:p>
+            <a:endParaRPr lang="es-CO"/>
+          </a:p>
+        </p:txBody>
       </p:sp>
       <p:pic>
         <p:nvPicPr>
@@ -9989,6 +10554,13 @@
           </a:solidFill>
           <a:ln/>
         </p:spPr>
+        <p:txBody>
+          <a:bodyPr/>
+          <a:lstStyle/>
+          <a:p>
+            <a:endParaRPr lang="es-CO"/>
+          </a:p>
+        </p:txBody>
       </p:sp>
       <p:pic>
         <p:nvPicPr>
@@ -10072,7 +10644,7 @@
         </p:nvSpPr>
         <p:spPr>
           <a:xfrm>
-            <a:off x="6812280" y="1783080"/>
+            <a:off x="6781800" y="502920"/>
             <a:ext cx="4709160" cy="4160520"/>
           </a:xfrm>
           <a:prstGeom prst="roundRect">
@@ -10092,6 +10664,13 @@
             </a:outerShdw>
           </a:effectLst>
         </p:spPr>
+        <p:txBody>
+          <a:bodyPr/>
+          <a:lstStyle/>
+          <a:p>
+            <a:endParaRPr lang="es-CO"/>
+          </a:p>
+        </p:txBody>
       </p:sp>
       <p:sp>
         <p:nvSpPr>
@@ -10101,7 +10680,7 @@
         </p:nvSpPr>
         <p:spPr>
           <a:xfrm>
-            <a:off x="7178040" y="2148840"/>
+            <a:off x="7147560" y="868680"/>
             <a:ext cx="777240" cy="777240"/>
           </a:xfrm>
           <a:prstGeom prst="ellipse">
@@ -10112,6 +10691,13 @@
           </a:solidFill>
           <a:ln/>
         </p:spPr>
+        <p:txBody>
+          <a:bodyPr/>
+          <a:lstStyle/>
+          <a:p>
+            <a:endParaRPr lang="es-CO"/>
+          </a:p>
+        </p:txBody>
       </p:sp>
       <p:pic>
         <p:nvPicPr>
@@ -10129,7 +10715,7 @@
         </p:blipFill>
         <p:spPr>
           <a:xfrm>
-            <a:off x="7349033" y="2319833"/>
+            <a:off x="7318553" y="1039673"/>
             <a:ext cx="435254" cy="435254"/>
           </a:xfrm>
           <a:prstGeom prst="rect">
@@ -10145,7 +10731,7 @@
         </p:nvSpPr>
         <p:spPr>
           <a:xfrm>
-            <a:off x="8138160" y="2286000"/>
+            <a:off x="8107680" y="1005840"/>
             <a:ext cx="3200400" cy="548640"/>
           </a:xfrm>
           <a:prstGeom prst="rect">
@@ -10184,7 +10770,7 @@
         </p:nvSpPr>
         <p:spPr>
           <a:xfrm>
-            <a:off x="7178040" y="3108960"/>
+            <a:off x="7147560" y="1828800"/>
             <a:ext cx="4023360" cy="2743200"/>
           </a:xfrm>
           <a:prstGeom prst="rect">
@@ -10391,6 +10977,37 @@
           </a:p>
         </p:txBody>
       </p:sp>
+      <p:pic>
+        <p:nvPicPr>
+          <p:cNvPr id="21" name="Imagen 20" descr="Diagrama&#10;&#10;Descripción generada automáticamente">
+            <a:extLst>
+              <a:ext uri="{FF2B5EF4-FFF2-40B4-BE49-F238E27FC236}">
+                <a16:creationId xmlns:a16="http://schemas.microsoft.com/office/drawing/2014/main" id="{AFBF32FB-A359-E3CD-DF91-5081E0041FD8}"/>
+              </a:ext>
+            </a:extLst>
+          </p:cNvPr>
+          <p:cNvPicPr>
+            <a:picLocks noChangeAspect="1"/>
+          </p:cNvPicPr>
+          <p:nvPr/>
+        </p:nvPicPr>
+        <p:blipFill>
+          <a:blip r:embed="rId7"/>
+          <a:stretch>
+            <a:fillRect/>
+          </a:stretch>
+        </p:blipFill>
+        <p:spPr>
+          <a:xfrm>
+            <a:off x="7056120" y="4080866"/>
+            <a:ext cx="4253024" cy="2743200"/>
+          </a:xfrm>
+          <a:prstGeom prst="rect">
+            <a:avLst/>
+          </a:prstGeom>
+          <a:noFill/>
+        </p:spPr>
+      </p:pic>
     </p:spTree>
   </p:cSld>
   <p:clrMapOvr>
@@ -10521,6 +11138,13 @@
           </a:solidFill>
           <a:ln/>
         </p:spPr>
+        <p:txBody>
+          <a:bodyPr/>
+          <a:lstStyle/>
+          <a:p>
+            <a:endParaRPr lang="es-CO"/>
+          </a:p>
+        </p:txBody>
       </p:sp>
       <p:sp>
         <p:nvSpPr>
@@ -10583,6 +11207,13 @@
             <a:prstDash val="solid"/>
           </a:ln>
         </p:spPr>
+        <p:txBody>
+          <a:bodyPr/>
+          <a:lstStyle/>
+          <a:p>
+            <a:endParaRPr lang="es-CO"/>
+          </a:p>
+        </p:txBody>
       </p:sp>
       <p:sp>
         <p:nvSpPr>
@@ -10592,7 +11223,7 @@
         </p:nvSpPr>
         <p:spPr>
           <a:xfrm>
-            <a:off x="2194560" y="2651760"/>
+            <a:off x="1861820" y="2404872"/>
             <a:ext cx="365760" cy="274320"/>
           </a:xfrm>
           <a:prstGeom prst="rect">
@@ -10639,6 +11270,13 @@
           </a:solidFill>
           <a:ln/>
         </p:spPr>
+        <p:txBody>
+          <a:bodyPr/>
+          <a:lstStyle/>
+          <a:p>
+            <a:endParaRPr lang="es-CO"/>
+          </a:p>
+        </p:txBody>
       </p:sp>
       <p:sp>
         <p:nvSpPr>
@@ -10701,6 +11339,13 @@
             <a:prstDash val="solid"/>
           </a:ln>
         </p:spPr>
+        <p:txBody>
+          <a:bodyPr/>
+          <a:lstStyle/>
+          <a:p>
+            <a:endParaRPr lang="es-CO"/>
+          </a:p>
+        </p:txBody>
       </p:sp>
       <p:sp>
         <p:nvSpPr>
@@ -10710,7 +11355,7 @@
         </p:nvSpPr>
         <p:spPr>
           <a:xfrm>
-            <a:off x="2194560" y="3017520"/>
+            <a:off x="1861820" y="3003296"/>
             <a:ext cx="365760" cy="274320"/>
           </a:xfrm>
           <a:prstGeom prst="rect">
@@ -10746,7 +11391,7 @@
         </p:nvSpPr>
         <p:spPr>
           <a:xfrm>
-            <a:off x="822960" y="3566160"/>
+            <a:off x="807720" y="3566160"/>
             <a:ext cx="548640" cy="548640"/>
           </a:xfrm>
           <a:prstGeom prst="ellipse">
@@ -10757,6 +11402,13 @@
           </a:solidFill>
           <a:ln/>
         </p:spPr>
+        <p:txBody>
+          <a:bodyPr/>
+          <a:lstStyle/>
+          <a:p>
+            <a:endParaRPr lang="es-CO"/>
+          </a:p>
+        </p:txBody>
       </p:sp>
       <p:sp>
         <p:nvSpPr>
@@ -10804,9 +11456,9 @@
           <p:nvPr/>
         </p:nvSpPr>
         <p:spPr>
-          <a:xfrm>
-            <a:off x="1371600" y="3840480"/>
-            <a:ext cx="2194560" cy="0"/>
+          <a:xfrm flipV="1">
+            <a:off x="1371600" y="3593592"/>
+            <a:ext cx="2179320" cy="246888"/>
           </a:xfrm>
           <a:prstGeom prst="line">
             <a:avLst/>
@@ -10819,6 +11471,13 @@
             <a:prstDash val="solid"/>
           </a:ln>
         </p:spPr>
+        <p:txBody>
+          <a:bodyPr/>
+          <a:lstStyle/>
+          <a:p>
+            <a:endParaRPr lang="es-CO"/>
+          </a:p>
+        </p:txBody>
       </p:sp>
       <p:sp>
         <p:nvSpPr>
@@ -10828,7 +11487,7 @@
         </p:nvSpPr>
         <p:spPr>
           <a:xfrm>
-            <a:off x="2194560" y="3383280"/>
+            <a:off x="1828800" y="3566160"/>
             <a:ext cx="365760" cy="274320"/>
           </a:xfrm>
           <a:prstGeom prst="rect">
@@ -10882,6 +11541,13 @@
             </a:outerShdw>
           </a:effectLst>
         </p:spPr>
+        <p:txBody>
+          <a:bodyPr/>
+          <a:lstStyle/>
+          <a:p>
+            <a:endParaRPr lang="es-CO"/>
+          </a:p>
+        </p:txBody>
       </p:sp>
       <p:sp>
         <p:nvSpPr>
@@ -10944,6 +11610,13 @@
             <a:prstDash val="solid"/>
           </a:ln>
         </p:spPr>
+        <p:txBody>
+          <a:bodyPr/>
+          <a:lstStyle/>
+          <a:p>
+            <a:endParaRPr lang="es-CO"/>
+          </a:p>
+        </p:txBody>
       </p:sp>
       <p:sp>
         <p:nvSpPr>
@@ -10973,6 +11646,13 @@
             </a:outerShdw>
           </a:effectLst>
         </p:spPr>
+        <p:txBody>
+          <a:bodyPr/>
+          <a:lstStyle/>
+          <a:p>
+            <a:endParaRPr lang="es-CO"/>
+          </a:p>
+        </p:txBody>
       </p:sp>
       <p:sp>
         <p:nvSpPr>
@@ -11035,6 +11715,13 @@
             <a:prstDash val="solid"/>
           </a:ln>
         </p:spPr>
+        <p:txBody>
+          <a:bodyPr/>
+          <a:lstStyle/>
+          <a:p>
+            <a:endParaRPr lang="es-CO"/>
+          </a:p>
+        </p:txBody>
       </p:sp>
       <p:sp>
         <p:nvSpPr>
@@ -11055,6 +11742,13 @@
           </a:solidFill>
           <a:ln/>
         </p:spPr>
+        <p:txBody>
+          <a:bodyPr/>
+          <a:lstStyle/>
+          <a:p>
+            <a:endParaRPr lang="es-CO"/>
+          </a:p>
+        </p:txBody>
       </p:sp>
       <p:sp>
         <p:nvSpPr>
@@ -11264,6 +11958,13 @@
             </a:outerShdw>
           </a:effectLst>
         </p:spPr>
+        <p:txBody>
+          <a:bodyPr/>
+          <a:lstStyle/>
+          <a:p>
+            <a:endParaRPr lang="es-CO"/>
+          </a:p>
+        </p:txBody>
       </p:sp>
       <p:sp>
         <p:nvSpPr>
@@ -11614,6 +12315,13 @@
             <a:prstDash val="solid"/>
           </a:ln>
         </p:spPr>
+        <p:txBody>
+          <a:bodyPr/>
+          <a:lstStyle/>
+          <a:p>
+            <a:endParaRPr lang="es-CO"/>
+          </a:p>
+        </p:txBody>
       </p:sp>
       <p:sp>
         <p:nvSpPr>
@@ -11622,9 +12330,9 @@
           <p:nvPr/>
         </p:nvSpPr>
         <p:spPr>
-          <a:xfrm>
-            <a:off x="1316736" y="3172968"/>
-            <a:ext cx="1563624" cy="27432"/>
+          <a:xfrm flipV="1">
+            <a:off x="1627632" y="2551175"/>
+            <a:ext cx="1283208" cy="621775"/>
           </a:xfrm>
           <a:prstGeom prst="line">
             <a:avLst/>
@@ -11637,6 +12345,13 @@
             <a:prstDash val="solid"/>
           </a:ln>
         </p:spPr>
+        <p:txBody>
+          <a:bodyPr/>
+          <a:lstStyle/>
+          <a:p>
+            <a:endParaRPr lang="es-CO"/>
+          </a:p>
+        </p:txBody>
       </p:sp>
       <p:sp>
         <p:nvSpPr>
@@ -11646,8 +12361,8 @@
         </p:nvSpPr>
         <p:spPr>
           <a:xfrm>
-            <a:off x="1316736" y="3172968"/>
-            <a:ext cx="1563624" cy="740664"/>
+            <a:off x="1597152" y="3161081"/>
+            <a:ext cx="1283208" cy="1438350"/>
           </a:xfrm>
           <a:prstGeom prst="line">
             <a:avLst/>
@@ -11660,17 +12375,24 @@
             <a:prstDash val="solid"/>
           </a:ln>
         </p:spPr>
-      </p:sp>
-      <p:sp>
-        <p:nvSpPr>
-          <p:cNvPr id="7" name="Shape 5"/>
-          <p:cNvSpPr/>
-          <p:nvPr/>
-        </p:nvSpPr>
-        <p:spPr>
-          <a:xfrm>
-            <a:off x="1316736" y="3172968"/>
-            <a:ext cx="1563624" cy="1453896"/>
+        <p:txBody>
+          <a:bodyPr/>
+          <a:lstStyle/>
+          <a:p>
+            <a:endParaRPr lang="es-CO"/>
+          </a:p>
+        </p:txBody>
+      </p:sp>
+      <p:sp>
+        <p:nvSpPr>
+          <p:cNvPr id="8" name="Shape 6"/>
+          <p:cNvSpPr/>
+          <p:nvPr/>
+        </p:nvSpPr>
+        <p:spPr>
+          <a:xfrm>
+            <a:off x="1316736" y="3886200"/>
+            <a:ext cx="1563624" cy="0"/>
           </a:xfrm>
           <a:prstGeom prst="line">
             <a:avLst/>
@@ -11683,10 +12405,17 @@
             <a:prstDash val="solid"/>
           </a:ln>
         </p:spPr>
-      </p:sp>
-      <p:sp>
-        <p:nvSpPr>
-          <p:cNvPr id="8" name="Shape 6"/>
+        <p:txBody>
+          <a:bodyPr/>
+          <a:lstStyle/>
+          <a:p>
+            <a:endParaRPr lang="es-CO"/>
+          </a:p>
+        </p:txBody>
+      </p:sp>
+      <p:sp>
+        <p:nvSpPr>
+          <p:cNvPr id="9" name="Shape 7"/>
           <p:cNvSpPr/>
           <p:nvPr/>
         </p:nvSpPr>
@@ -11706,17 +12435,24 @@
             <a:prstDash val="solid"/>
           </a:ln>
         </p:spPr>
-      </p:sp>
-      <p:sp>
-        <p:nvSpPr>
-          <p:cNvPr id="9" name="Shape 7"/>
-          <p:cNvSpPr/>
-          <p:nvPr/>
-        </p:nvSpPr>
-        <p:spPr>
-          <a:xfrm>
-            <a:off x="1316736" y="3886200"/>
-            <a:ext cx="1563624" cy="0"/>
+        <p:txBody>
+          <a:bodyPr/>
+          <a:lstStyle/>
+          <a:p>
+            <a:endParaRPr lang="es-CO"/>
+          </a:p>
+        </p:txBody>
+      </p:sp>
+      <p:sp>
+        <p:nvSpPr>
+          <p:cNvPr id="10" name="Shape 8"/>
+          <p:cNvSpPr/>
+          <p:nvPr/>
+        </p:nvSpPr>
+        <p:spPr>
+          <a:xfrm flipV="1">
+            <a:off x="1597152" y="3172962"/>
+            <a:ext cx="1283208" cy="713232"/>
           </a:xfrm>
           <a:prstGeom prst="line">
             <a:avLst/>
@@ -11729,17 +12465,24 @@
             <a:prstDash val="solid"/>
           </a:ln>
         </p:spPr>
-      </p:sp>
-      <p:sp>
-        <p:nvSpPr>
-          <p:cNvPr id="10" name="Shape 8"/>
-          <p:cNvSpPr/>
-          <p:nvPr/>
-        </p:nvSpPr>
-        <p:spPr>
-          <a:xfrm>
-            <a:off x="1316736" y="3886200"/>
-            <a:ext cx="1563624" cy="27432"/>
+        <p:txBody>
+          <a:bodyPr/>
+          <a:lstStyle/>
+          <a:p>
+            <a:endParaRPr lang="es-CO"/>
+          </a:p>
+        </p:txBody>
+      </p:sp>
+      <p:sp>
+        <p:nvSpPr>
+          <p:cNvPr id="11" name="Shape 9"/>
+          <p:cNvSpPr/>
+          <p:nvPr/>
+        </p:nvSpPr>
+        <p:spPr>
+          <a:xfrm>
+            <a:off x="1627632" y="3874313"/>
+            <a:ext cx="1252728" cy="752551"/>
           </a:xfrm>
           <a:prstGeom prst="line">
             <a:avLst/>
@@ -11752,17 +12495,24 @@
             <a:prstDash val="solid"/>
           </a:ln>
         </p:spPr>
-      </p:sp>
-      <p:sp>
-        <p:nvSpPr>
-          <p:cNvPr id="11" name="Shape 9"/>
-          <p:cNvSpPr/>
-          <p:nvPr/>
-        </p:nvSpPr>
-        <p:spPr>
-          <a:xfrm>
-            <a:off x="1316736" y="3886200"/>
-            <a:ext cx="1563624" cy="740664"/>
+        <p:txBody>
+          <a:bodyPr/>
+          <a:lstStyle/>
+          <a:p>
+            <a:endParaRPr lang="es-CO"/>
+          </a:p>
+        </p:txBody>
+      </p:sp>
+      <p:sp>
+        <p:nvSpPr>
+          <p:cNvPr id="12" name="Shape 10"/>
+          <p:cNvSpPr/>
+          <p:nvPr/>
+        </p:nvSpPr>
+        <p:spPr>
+          <a:xfrm flipV="1">
+            <a:off x="3471670" y="2487168"/>
+            <a:ext cx="1283209" cy="64002"/>
           </a:xfrm>
           <a:prstGeom prst="line">
             <a:avLst/>
@@ -11775,17 +12525,24 @@
             <a:prstDash val="solid"/>
           </a:ln>
         </p:spPr>
-      </p:sp>
-      <p:sp>
-        <p:nvSpPr>
-          <p:cNvPr id="12" name="Shape 10"/>
-          <p:cNvSpPr/>
-          <p:nvPr/>
-        </p:nvSpPr>
-        <p:spPr>
-          <a:xfrm>
-            <a:off x="3191256" y="2487168"/>
-            <a:ext cx="1563624" cy="0"/>
+        <p:txBody>
+          <a:bodyPr/>
+          <a:lstStyle/>
+          <a:p>
+            <a:endParaRPr lang="es-CO"/>
+          </a:p>
+        </p:txBody>
+      </p:sp>
+      <p:sp>
+        <p:nvSpPr>
+          <p:cNvPr id="13" name="Shape 11"/>
+          <p:cNvSpPr/>
+          <p:nvPr/>
+        </p:nvSpPr>
+        <p:spPr>
+          <a:xfrm>
+            <a:off x="3471672" y="2551170"/>
+            <a:ext cx="1283208" cy="649229"/>
           </a:xfrm>
           <a:prstGeom prst="line">
             <a:avLst/>
@@ -11798,17 +12555,24 @@
             <a:prstDash val="solid"/>
           </a:ln>
         </p:spPr>
-      </p:sp>
-      <p:sp>
-        <p:nvSpPr>
-          <p:cNvPr id="13" name="Shape 11"/>
-          <p:cNvSpPr/>
-          <p:nvPr/>
-        </p:nvSpPr>
-        <p:spPr>
-          <a:xfrm>
-            <a:off x="3191256" y="2487168"/>
-            <a:ext cx="1563624" cy="713232"/>
+        <p:txBody>
+          <a:bodyPr/>
+          <a:lstStyle/>
+          <a:p>
+            <a:endParaRPr lang="es-CO"/>
+          </a:p>
+        </p:txBody>
+      </p:sp>
+      <p:sp>
+        <p:nvSpPr>
+          <p:cNvPr id="14" name="Shape 12"/>
+          <p:cNvSpPr/>
+          <p:nvPr/>
+        </p:nvSpPr>
+        <p:spPr>
+          <a:xfrm>
+            <a:off x="3471672" y="2551172"/>
+            <a:ext cx="1283208" cy="1362459"/>
           </a:xfrm>
           <a:prstGeom prst="line">
             <a:avLst/>
@@ -11821,17 +12585,24 @@
             <a:prstDash val="solid"/>
           </a:ln>
         </p:spPr>
-      </p:sp>
-      <p:sp>
-        <p:nvSpPr>
-          <p:cNvPr id="14" name="Shape 12"/>
-          <p:cNvSpPr/>
-          <p:nvPr/>
-        </p:nvSpPr>
-        <p:spPr>
-          <a:xfrm>
-            <a:off x="3191256" y="2487168"/>
-            <a:ext cx="1563624" cy="1426464"/>
+        <p:txBody>
+          <a:bodyPr/>
+          <a:lstStyle/>
+          <a:p>
+            <a:endParaRPr lang="es-CO"/>
+          </a:p>
+        </p:txBody>
+      </p:sp>
+      <p:sp>
+        <p:nvSpPr>
+          <p:cNvPr id="15" name="Shape 13"/>
+          <p:cNvSpPr/>
+          <p:nvPr/>
+        </p:nvSpPr>
+        <p:spPr>
+          <a:xfrm>
+            <a:off x="3471672" y="2551174"/>
+            <a:ext cx="1283208" cy="2075689"/>
           </a:xfrm>
           <a:prstGeom prst="line">
             <a:avLst/>
@@ -11844,17 +12615,24 @@
             <a:prstDash val="solid"/>
           </a:ln>
         </p:spPr>
-      </p:sp>
-      <p:sp>
-        <p:nvSpPr>
-          <p:cNvPr id="15" name="Shape 13"/>
-          <p:cNvSpPr/>
-          <p:nvPr/>
-        </p:nvSpPr>
-        <p:spPr>
-          <a:xfrm>
-            <a:off x="3191256" y="2487168"/>
-            <a:ext cx="1563624" cy="2139696"/>
+        <p:txBody>
+          <a:bodyPr/>
+          <a:lstStyle/>
+          <a:p>
+            <a:endParaRPr lang="es-CO"/>
+          </a:p>
+        </p:txBody>
+      </p:sp>
+      <p:sp>
+        <p:nvSpPr>
+          <p:cNvPr id="16" name="Shape 14"/>
+          <p:cNvSpPr/>
+          <p:nvPr/>
+        </p:nvSpPr>
+        <p:spPr>
+          <a:xfrm>
+            <a:off x="3191256" y="3200400"/>
+            <a:ext cx="1563624" cy="0"/>
           </a:xfrm>
           <a:prstGeom prst="line">
             <a:avLst/>
@@ -11867,10 +12645,17 @@
             <a:prstDash val="solid"/>
           </a:ln>
         </p:spPr>
-      </p:sp>
-      <p:sp>
-        <p:nvSpPr>
-          <p:cNvPr id="16" name="Shape 14"/>
+        <p:txBody>
+          <a:bodyPr/>
+          <a:lstStyle/>
+          <a:p>
+            <a:endParaRPr lang="es-CO"/>
+          </a:p>
+        </p:txBody>
+      </p:sp>
+      <p:sp>
+        <p:nvSpPr>
+          <p:cNvPr id="17" name="Shape 15"/>
           <p:cNvSpPr/>
           <p:nvPr/>
         </p:nvSpPr>
@@ -11890,17 +12675,24 @@
             <a:prstDash val="solid"/>
           </a:ln>
         </p:spPr>
-      </p:sp>
-      <p:sp>
-        <p:nvSpPr>
-          <p:cNvPr id="17" name="Shape 15"/>
-          <p:cNvSpPr/>
-          <p:nvPr/>
-        </p:nvSpPr>
-        <p:spPr>
-          <a:xfrm>
-            <a:off x="3191256" y="3200400"/>
-            <a:ext cx="1563624" cy="0"/>
+        <p:txBody>
+          <a:bodyPr/>
+          <a:lstStyle/>
+          <a:p>
+            <a:endParaRPr lang="es-CO"/>
+          </a:p>
+        </p:txBody>
+      </p:sp>
+      <p:sp>
+        <p:nvSpPr>
+          <p:cNvPr id="18" name="Shape 16"/>
+          <p:cNvSpPr/>
+          <p:nvPr/>
+        </p:nvSpPr>
+        <p:spPr>
+          <a:xfrm>
+            <a:off x="3471670" y="3200398"/>
+            <a:ext cx="1283210" cy="713234"/>
           </a:xfrm>
           <a:prstGeom prst="line">
             <a:avLst/>
@@ -11913,17 +12705,24 @@
             <a:prstDash val="solid"/>
           </a:ln>
         </p:spPr>
-      </p:sp>
-      <p:sp>
-        <p:nvSpPr>
-          <p:cNvPr id="18" name="Shape 16"/>
-          <p:cNvSpPr/>
-          <p:nvPr/>
-        </p:nvSpPr>
-        <p:spPr>
-          <a:xfrm>
-            <a:off x="3191256" y="3200400"/>
-            <a:ext cx="1563624" cy="713232"/>
+        <p:txBody>
+          <a:bodyPr/>
+          <a:lstStyle/>
+          <a:p>
+            <a:endParaRPr lang="es-CO"/>
+          </a:p>
+        </p:txBody>
+      </p:sp>
+      <p:sp>
+        <p:nvSpPr>
+          <p:cNvPr id="19" name="Shape 17"/>
+          <p:cNvSpPr/>
+          <p:nvPr/>
+        </p:nvSpPr>
+        <p:spPr>
+          <a:xfrm>
+            <a:off x="3471670" y="3200399"/>
+            <a:ext cx="1283210" cy="1426465"/>
           </a:xfrm>
           <a:prstGeom prst="line">
             <a:avLst/>
@@ -11936,17 +12735,24 @@
             <a:prstDash val="solid"/>
           </a:ln>
         </p:spPr>
-      </p:sp>
-      <p:sp>
-        <p:nvSpPr>
-          <p:cNvPr id="19" name="Shape 17"/>
-          <p:cNvSpPr/>
-          <p:nvPr/>
-        </p:nvSpPr>
-        <p:spPr>
-          <a:xfrm>
-            <a:off x="3191256" y="3200400"/>
-            <a:ext cx="1563624" cy="1426464"/>
+        <p:txBody>
+          <a:bodyPr/>
+          <a:lstStyle/>
+          <a:p>
+            <a:endParaRPr lang="es-CO"/>
+          </a:p>
+        </p:txBody>
+      </p:sp>
+      <p:sp>
+        <p:nvSpPr>
+          <p:cNvPr id="20" name="Shape 18"/>
+          <p:cNvSpPr/>
+          <p:nvPr/>
+        </p:nvSpPr>
+        <p:spPr>
+          <a:xfrm>
+            <a:off x="3191256" y="3913632"/>
+            <a:ext cx="1563624" cy="0"/>
           </a:xfrm>
           <a:prstGeom prst="line">
             <a:avLst/>
@@ -11959,10 +12765,17 @@
             <a:prstDash val="solid"/>
           </a:ln>
         </p:spPr>
-      </p:sp>
-      <p:sp>
-        <p:nvSpPr>
-          <p:cNvPr id="20" name="Shape 18"/>
+        <p:txBody>
+          <a:bodyPr/>
+          <a:lstStyle/>
+          <a:p>
+            <a:endParaRPr lang="es-CO"/>
+          </a:p>
+        </p:txBody>
+      </p:sp>
+      <p:sp>
+        <p:nvSpPr>
+          <p:cNvPr id="21" name="Shape 19"/>
           <p:cNvSpPr/>
           <p:nvPr/>
         </p:nvSpPr>
@@ -11982,10 +12795,17 @@
             <a:prstDash val="solid"/>
           </a:ln>
         </p:spPr>
-      </p:sp>
-      <p:sp>
-        <p:nvSpPr>
-          <p:cNvPr id="21" name="Shape 19"/>
+        <p:txBody>
+          <a:bodyPr/>
+          <a:lstStyle/>
+          <a:p>
+            <a:endParaRPr lang="es-CO"/>
+          </a:p>
+        </p:txBody>
+      </p:sp>
+      <p:sp>
+        <p:nvSpPr>
+          <p:cNvPr id="22" name="Shape 20"/>
           <p:cNvSpPr/>
           <p:nvPr/>
         </p:nvSpPr>
@@ -12005,17 +12825,24 @@
             <a:prstDash val="solid"/>
           </a:ln>
         </p:spPr>
-      </p:sp>
-      <p:sp>
-        <p:nvSpPr>
-          <p:cNvPr id="22" name="Shape 20"/>
-          <p:cNvSpPr/>
-          <p:nvPr/>
-        </p:nvSpPr>
-        <p:spPr>
-          <a:xfrm>
-            <a:off x="3191256" y="3913632"/>
-            <a:ext cx="1563624" cy="0"/>
+        <p:txBody>
+          <a:bodyPr/>
+          <a:lstStyle/>
+          <a:p>
+            <a:endParaRPr lang="es-CO"/>
+          </a:p>
+        </p:txBody>
+      </p:sp>
+      <p:sp>
+        <p:nvSpPr>
+          <p:cNvPr id="23" name="Shape 21"/>
+          <p:cNvSpPr/>
+          <p:nvPr/>
+        </p:nvSpPr>
+        <p:spPr>
+          <a:xfrm>
+            <a:off x="3502152" y="3913631"/>
+            <a:ext cx="1252728" cy="713233"/>
           </a:xfrm>
           <a:prstGeom prst="line">
             <a:avLst/>
@@ -12028,17 +12855,24 @@
             <a:prstDash val="solid"/>
           </a:ln>
         </p:spPr>
-      </p:sp>
-      <p:sp>
-        <p:nvSpPr>
-          <p:cNvPr id="23" name="Shape 21"/>
-          <p:cNvSpPr/>
-          <p:nvPr/>
-        </p:nvSpPr>
-        <p:spPr>
-          <a:xfrm>
-            <a:off x="3191256" y="3913632"/>
-            <a:ext cx="1563624" cy="713232"/>
+        <p:txBody>
+          <a:bodyPr/>
+          <a:lstStyle/>
+          <a:p>
+            <a:endParaRPr lang="es-CO"/>
+          </a:p>
+        </p:txBody>
+      </p:sp>
+      <p:sp>
+        <p:nvSpPr>
+          <p:cNvPr id="24" name="Shape 22"/>
+          <p:cNvSpPr/>
+          <p:nvPr/>
+        </p:nvSpPr>
+        <p:spPr>
+          <a:xfrm>
+            <a:off x="3191256" y="4626864"/>
+            <a:ext cx="1563624" cy="0"/>
           </a:xfrm>
           <a:prstGeom prst="line">
             <a:avLst/>
@@ -12051,10 +12885,17 @@
             <a:prstDash val="solid"/>
           </a:ln>
         </p:spPr>
-      </p:sp>
-      <p:sp>
-        <p:nvSpPr>
-          <p:cNvPr id="24" name="Shape 22"/>
+        <p:txBody>
+          <a:bodyPr/>
+          <a:lstStyle/>
+          <a:p>
+            <a:endParaRPr lang="es-CO"/>
+          </a:p>
+        </p:txBody>
+      </p:sp>
+      <p:sp>
+        <p:nvSpPr>
+          <p:cNvPr id="25" name="Shape 23"/>
           <p:cNvSpPr/>
           <p:nvPr/>
         </p:nvSpPr>
@@ -12074,10 +12915,17 @@
             <a:prstDash val="solid"/>
           </a:ln>
         </p:spPr>
-      </p:sp>
-      <p:sp>
-        <p:nvSpPr>
-          <p:cNvPr id="25" name="Shape 23"/>
+        <p:txBody>
+          <a:bodyPr/>
+          <a:lstStyle/>
+          <a:p>
+            <a:endParaRPr lang="es-CO"/>
+          </a:p>
+        </p:txBody>
+      </p:sp>
+      <p:sp>
+        <p:nvSpPr>
+          <p:cNvPr id="26" name="Shape 24"/>
           <p:cNvSpPr/>
           <p:nvPr/>
         </p:nvSpPr>
@@ -12097,10 +12945,17 @@
             <a:prstDash val="solid"/>
           </a:ln>
         </p:spPr>
-      </p:sp>
-      <p:sp>
-        <p:nvSpPr>
-          <p:cNvPr id="26" name="Shape 24"/>
+        <p:txBody>
+          <a:bodyPr/>
+          <a:lstStyle/>
+          <a:p>
+            <a:endParaRPr lang="es-CO"/>
+          </a:p>
+        </p:txBody>
+      </p:sp>
+      <p:sp>
+        <p:nvSpPr>
+          <p:cNvPr id="27" name="Shape 25"/>
           <p:cNvSpPr/>
           <p:nvPr/>
         </p:nvSpPr>
@@ -12120,17 +12975,24 @@
             <a:prstDash val="solid"/>
           </a:ln>
         </p:spPr>
-      </p:sp>
-      <p:sp>
-        <p:nvSpPr>
-          <p:cNvPr id="27" name="Shape 25"/>
-          <p:cNvSpPr/>
-          <p:nvPr/>
-        </p:nvSpPr>
-        <p:spPr>
-          <a:xfrm>
-            <a:off x="3191256" y="4626864"/>
-            <a:ext cx="1563624" cy="0"/>
+        <p:txBody>
+          <a:bodyPr/>
+          <a:lstStyle/>
+          <a:p>
+            <a:endParaRPr lang="es-CO"/>
+          </a:p>
+        </p:txBody>
+      </p:sp>
+      <p:sp>
+        <p:nvSpPr>
+          <p:cNvPr id="28" name="Shape 26"/>
+          <p:cNvSpPr/>
+          <p:nvPr/>
+        </p:nvSpPr>
+        <p:spPr>
+          <a:xfrm>
+            <a:off x="5065776" y="2487168"/>
+            <a:ext cx="1563624" cy="1097280"/>
           </a:xfrm>
           <a:prstGeom prst="line">
             <a:avLst/>
@@ -12143,17 +13005,24 @@
             <a:prstDash val="solid"/>
           </a:ln>
         </p:spPr>
-      </p:sp>
-      <p:sp>
-        <p:nvSpPr>
-          <p:cNvPr id="28" name="Shape 26"/>
-          <p:cNvSpPr/>
-          <p:nvPr/>
-        </p:nvSpPr>
-        <p:spPr>
-          <a:xfrm>
-            <a:off x="5065776" y="2487168"/>
-            <a:ext cx="1563624" cy="1097280"/>
+        <p:txBody>
+          <a:bodyPr/>
+          <a:lstStyle/>
+          <a:p>
+            <a:endParaRPr lang="es-CO"/>
+          </a:p>
+        </p:txBody>
+      </p:sp>
+      <p:sp>
+        <p:nvSpPr>
+          <p:cNvPr id="29" name="Shape 27"/>
+          <p:cNvSpPr/>
+          <p:nvPr/>
+        </p:nvSpPr>
+        <p:spPr>
+          <a:xfrm>
+            <a:off x="5065776" y="3200400"/>
+            <a:ext cx="1563624" cy="384048"/>
           </a:xfrm>
           <a:prstGeom prst="line">
             <a:avLst/>
@@ -12166,17 +13035,24 @@
             <a:prstDash val="solid"/>
           </a:ln>
         </p:spPr>
-      </p:sp>
-      <p:sp>
-        <p:nvSpPr>
-          <p:cNvPr id="29" name="Shape 27"/>
-          <p:cNvSpPr/>
-          <p:nvPr/>
-        </p:nvSpPr>
-        <p:spPr>
-          <a:xfrm>
-            <a:off x="5065776" y="3200400"/>
-            <a:ext cx="1563624" cy="384048"/>
+        <p:txBody>
+          <a:bodyPr/>
+          <a:lstStyle/>
+          <a:p>
+            <a:endParaRPr lang="es-CO"/>
+          </a:p>
+        </p:txBody>
+      </p:sp>
+      <p:sp>
+        <p:nvSpPr>
+          <p:cNvPr id="30" name="Shape 28"/>
+          <p:cNvSpPr/>
+          <p:nvPr/>
+        </p:nvSpPr>
+        <p:spPr>
+          <a:xfrm flipV="1">
+            <a:off x="5065776" y="3602736"/>
+            <a:ext cx="1563624" cy="310896"/>
           </a:xfrm>
           <a:prstGeom prst="line">
             <a:avLst/>
@@ -12189,17 +13065,24 @@
             <a:prstDash val="solid"/>
           </a:ln>
         </p:spPr>
-      </p:sp>
-      <p:sp>
-        <p:nvSpPr>
-          <p:cNvPr id="30" name="Shape 28"/>
-          <p:cNvSpPr/>
-          <p:nvPr/>
-        </p:nvSpPr>
-        <p:spPr>
-          <a:xfrm>
-            <a:off x="5065776" y="3913632"/>
-            <a:ext cx="1563624" cy="0"/>
+        <p:txBody>
+          <a:bodyPr/>
+          <a:lstStyle/>
+          <a:p>
+            <a:endParaRPr lang="es-CO"/>
+          </a:p>
+        </p:txBody>
+      </p:sp>
+      <p:sp>
+        <p:nvSpPr>
+          <p:cNvPr id="31" name="Shape 29"/>
+          <p:cNvSpPr/>
+          <p:nvPr/>
+        </p:nvSpPr>
+        <p:spPr>
+          <a:xfrm flipV="1">
+            <a:off x="5065776" y="3602736"/>
+            <a:ext cx="1563624" cy="1024128"/>
           </a:xfrm>
           <a:prstGeom prst="line">
             <a:avLst/>
@@ -12212,29 +13095,13 @@
             <a:prstDash val="solid"/>
           </a:ln>
         </p:spPr>
-      </p:sp>
-      <p:sp>
-        <p:nvSpPr>
-          <p:cNvPr id="31" name="Shape 29"/>
-          <p:cNvSpPr/>
-          <p:nvPr/>
-        </p:nvSpPr>
-        <p:spPr>
-          <a:xfrm>
-            <a:off x="5065776" y="4626864"/>
-            <a:ext cx="1563624" cy="0"/>
-          </a:xfrm>
-          <a:prstGeom prst="line">
-            <a:avLst/>
-          </a:prstGeom>
-          <a:noFill/>
-          <a:ln w="12700">
-            <a:solidFill>
-              <a:srgbClr val="BFE0DD"/>
-            </a:solidFill>
-            <a:prstDash val="solid"/>
-          </a:ln>
-        </p:spPr>
+        <p:txBody>
+          <a:bodyPr/>
+          <a:lstStyle/>
+          <a:p>
+            <a:endParaRPr lang="es-CO"/>
+          </a:p>
+        </p:txBody>
       </p:sp>
       <p:sp>
         <p:nvSpPr>
@@ -12255,6 +13122,13 @@
           </a:solidFill>
           <a:ln/>
         </p:spPr>
+        <p:txBody>
+          <a:bodyPr/>
+          <a:lstStyle/>
+          <a:p>
+            <a:endParaRPr lang="es-CO"/>
+          </a:p>
+        </p:txBody>
       </p:sp>
       <p:sp>
         <p:nvSpPr>
@@ -12275,6 +13149,13 @@
           </a:solidFill>
           <a:ln/>
         </p:spPr>
+        <p:txBody>
+          <a:bodyPr/>
+          <a:lstStyle/>
+          <a:p>
+            <a:endParaRPr lang="es-CO"/>
+          </a:p>
+        </p:txBody>
       </p:sp>
       <p:sp>
         <p:nvSpPr>
@@ -12295,6 +13176,13 @@
           </a:solidFill>
           <a:ln/>
         </p:spPr>
+        <p:txBody>
+          <a:bodyPr/>
+          <a:lstStyle/>
+          <a:p>
+            <a:endParaRPr lang="es-CO"/>
+          </a:p>
+        </p:txBody>
       </p:sp>
       <p:sp>
         <p:nvSpPr>
@@ -12315,6 +13203,13 @@
           </a:solidFill>
           <a:ln/>
         </p:spPr>
+        <p:txBody>
+          <a:bodyPr/>
+          <a:lstStyle/>
+          <a:p>
+            <a:endParaRPr lang="es-CO"/>
+          </a:p>
+        </p:txBody>
       </p:sp>
       <p:sp>
         <p:nvSpPr>
@@ -12335,6 +13230,13 @@
           </a:solidFill>
           <a:ln/>
         </p:spPr>
+        <p:txBody>
+          <a:bodyPr/>
+          <a:lstStyle/>
+          <a:p>
+            <a:endParaRPr lang="es-CO"/>
+          </a:p>
+        </p:txBody>
       </p:sp>
       <p:sp>
         <p:nvSpPr>
@@ -12355,6 +13257,13 @@
           </a:solidFill>
           <a:ln/>
         </p:spPr>
+        <p:txBody>
+          <a:bodyPr/>
+          <a:lstStyle/>
+          <a:p>
+            <a:endParaRPr lang="es-CO"/>
+          </a:p>
+        </p:txBody>
       </p:sp>
       <p:sp>
         <p:nvSpPr>
@@ -12375,6 +13284,13 @@
           </a:solidFill>
           <a:ln/>
         </p:spPr>
+        <p:txBody>
+          <a:bodyPr/>
+          <a:lstStyle/>
+          <a:p>
+            <a:endParaRPr lang="es-CO"/>
+          </a:p>
+        </p:txBody>
       </p:sp>
       <p:sp>
         <p:nvSpPr>
@@ -12395,6 +13311,13 @@
           </a:solidFill>
           <a:ln/>
         </p:spPr>
+        <p:txBody>
+          <a:bodyPr/>
+          <a:lstStyle/>
+          <a:p>
+            <a:endParaRPr lang="es-CO"/>
+          </a:p>
+        </p:txBody>
       </p:sp>
       <p:sp>
         <p:nvSpPr>
@@ -12415,6 +13338,13 @@
           </a:solidFill>
           <a:ln/>
         </p:spPr>
+        <p:txBody>
+          <a:bodyPr/>
+          <a:lstStyle/>
+          <a:p>
+            <a:endParaRPr lang="es-CO"/>
+          </a:p>
+        </p:txBody>
       </p:sp>
       <p:sp>
         <p:nvSpPr>
@@ -12435,6 +13365,13 @@
           </a:solidFill>
           <a:ln/>
         </p:spPr>
+        <p:txBody>
+          <a:bodyPr/>
+          <a:lstStyle/>
+          <a:p>
+            <a:endParaRPr lang="es-CO"/>
+          </a:p>
+        </p:txBody>
       </p:sp>
       <p:sp>
         <p:nvSpPr>
@@ -12455,6 +13392,13 @@
           </a:solidFill>
           <a:ln/>
         </p:spPr>
+        <p:txBody>
+          <a:bodyPr/>
+          <a:lstStyle/>
+          <a:p>
+            <a:endParaRPr lang="es-CO"/>
+          </a:p>
+        </p:txBody>
       </p:sp>
       <p:sp>
         <p:nvSpPr>
@@ -12628,6 +13572,13 @@
             </a:outerShdw>
           </a:effectLst>
         </p:spPr>
+        <p:txBody>
+          <a:bodyPr/>
+          <a:lstStyle/>
+          <a:p>
+            <a:endParaRPr lang="es-CO"/>
+          </a:p>
+        </p:txBody>
       </p:sp>
       <p:sp>
         <p:nvSpPr>
@@ -12648,6 +13599,13 @@
           </a:solidFill>
           <a:ln/>
         </p:spPr>
+        <p:txBody>
+          <a:bodyPr/>
+          <a:lstStyle/>
+          <a:p>
+            <a:endParaRPr lang="es-CO"/>
+          </a:p>
+        </p:txBody>
       </p:sp>
       <p:pic>
         <p:nvPicPr>
@@ -12850,6 +13808,78 @@
               <a:t>6</a:t>
             </a:r>
             <a:endParaRPr lang="en-US" sz="900" dirty="0"/>
+          </a:p>
+        </p:txBody>
+      </p:sp>
+      <p:sp>
+        <p:nvSpPr>
+          <p:cNvPr id="54" name="Shape 3">
+            <a:extLst>
+              <a:ext uri="{FF2B5EF4-FFF2-40B4-BE49-F238E27FC236}">
+                <a16:creationId xmlns:a16="http://schemas.microsoft.com/office/drawing/2014/main" id="{977A146C-7528-32EE-D3FB-CEEAE51FBC1A}"/>
+              </a:ext>
+            </a:extLst>
+          </p:cNvPr>
+          <p:cNvSpPr/>
+          <p:nvPr/>
+        </p:nvSpPr>
+        <p:spPr>
+          <a:xfrm>
+            <a:off x="1627632" y="3188496"/>
+            <a:ext cx="1252728" cy="697700"/>
+          </a:xfrm>
+          <a:prstGeom prst="line">
+            <a:avLst/>
+          </a:prstGeom>
+          <a:noFill/>
+          <a:ln w="12700">
+            <a:solidFill>
+              <a:srgbClr val="BFE0DD"/>
+            </a:solidFill>
+            <a:prstDash val="solid"/>
+          </a:ln>
+        </p:spPr>
+        <p:txBody>
+          <a:bodyPr/>
+          <a:lstStyle/>
+          <a:p>
+            <a:endParaRPr lang="es-CO"/>
+          </a:p>
+        </p:txBody>
+      </p:sp>
+      <p:sp>
+        <p:nvSpPr>
+          <p:cNvPr id="55" name="Shape 3">
+            <a:extLst>
+              <a:ext uri="{FF2B5EF4-FFF2-40B4-BE49-F238E27FC236}">
+                <a16:creationId xmlns:a16="http://schemas.microsoft.com/office/drawing/2014/main" id="{9F0A7108-B1D3-B08C-166F-BFAC21506FF0}"/>
+              </a:ext>
+            </a:extLst>
+          </p:cNvPr>
+          <p:cNvSpPr/>
+          <p:nvPr/>
+        </p:nvSpPr>
+        <p:spPr>
+          <a:xfrm flipV="1">
+            <a:off x="1627632" y="2566721"/>
+            <a:ext cx="1252728" cy="1307592"/>
+          </a:xfrm>
+          <a:prstGeom prst="line">
+            <a:avLst/>
+          </a:prstGeom>
+          <a:noFill/>
+          <a:ln w="12700">
+            <a:solidFill>
+              <a:srgbClr val="BFE0DD"/>
+            </a:solidFill>
+            <a:prstDash val="solid"/>
+          </a:ln>
+        </p:spPr>
+        <p:txBody>
+          <a:bodyPr/>
+          <a:lstStyle/>
+          <a:p>
+            <a:endParaRPr lang="es-CO"/>
           </a:p>
         </p:txBody>
       </p:sp>
@@ -12992,6 +14022,13 @@
             </a:outerShdw>
           </a:effectLst>
         </p:spPr>
+        <p:txBody>
+          <a:bodyPr/>
+          <a:lstStyle/>
+          <a:p>
+            <a:endParaRPr lang="es-CO"/>
+          </a:p>
+        </p:txBody>
       </p:sp>
       <p:sp>
         <p:nvSpPr>
@@ -13012,6 +14049,13 @@
           </a:solidFill>
           <a:ln/>
         </p:spPr>
+        <p:txBody>
+          <a:bodyPr/>
+          <a:lstStyle/>
+          <a:p>
+            <a:endParaRPr lang="es-CO"/>
+          </a:p>
+        </p:txBody>
       </p:sp>
       <p:pic>
         <p:nvPicPr>
@@ -13198,6 +14242,13 @@
             </a:outerShdw>
           </a:effectLst>
         </p:spPr>
+        <p:txBody>
+          <a:bodyPr/>
+          <a:lstStyle/>
+          <a:p>
+            <a:endParaRPr lang="es-CO"/>
+          </a:p>
+        </p:txBody>
       </p:sp>
       <p:sp>
         <p:nvSpPr>
@@ -13218,6 +14269,13 @@
           </a:solidFill>
           <a:ln/>
         </p:spPr>
+        <p:txBody>
+          <a:bodyPr/>
+          <a:lstStyle/>
+          <a:p>
+            <a:endParaRPr lang="es-CO"/>
+          </a:p>
+        </p:txBody>
       </p:sp>
       <p:pic>
         <p:nvPicPr>
@@ -13505,6 +14563,13 @@
           </a:solidFill>
           <a:ln/>
         </p:spPr>
+        <p:txBody>
+          <a:bodyPr/>
+          <a:lstStyle/>
+          <a:p>
+            <a:endParaRPr lang="es-CO"/>
+          </a:p>
+        </p:txBody>
       </p:sp>
       <p:sp>
         <p:nvSpPr>
@@ -13525,6 +14590,13 @@
           </a:solidFill>
           <a:ln/>
         </p:spPr>
+        <p:txBody>
+          <a:bodyPr/>
+          <a:lstStyle/>
+          <a:p>
+            <a:endParaRPr lang="es-CO"/>
+          </a:p>
+        </p:txBody>
       </p:sp>
       <p:pic>
         <p:nvPicPr>
@@ -13684,8 +14756,8 @@
         </p:nvSpPr>
         <p:spPr>
           <a:xfrm>
-            <a:off x="868680" y="4434840"/>
-            <a:ext cx="9601200" cy="822960"/>
+            <a:off x="868679" y="4434840"/>
+            <a:ext cx="9839077" cy="822960"/>
           </a:xfrm>
           <a:prstGeom prst="rect">
             <a:avLst/>
@@ -13857,6 +14929,13 @@
             </a:outerShdw>
           </a:effectLst>
         </p:spPr>
+        <p:txBody>
+          <a:bodyPr/>
+          <a:lstStyle/>
+          <a:p>
+            <a:endParaRPr lang="es-CO"/>
+          </a:p>
+        </p:txBody>
       </p:sp>
       <p:sp>
         <p:nvSpPr>
@@ -13877,6 +14956,13 @@
           </a:solidFill>
           <a:ln/>
         </p:spPr>
+        <p:txBody>
+          <a:bodyPr/>
+          <a:lstStyle/>
+          <a:p>
+            <a:endParaRPr lang="es-CO"/>
+          </a:p>
+        </p:txBody>
       </p:sp>
       <p:sp>
         <p:nvSpPr>
@@ -13996,6 +15082,13 @@
             </a:outerShdw>
           </a:effectLst>
         </p:spPr>
+        <p:txBody>
+          <a:bodyPr/>
+          <a:lstStyle/>
+          <a:p>
+            <a:endParaRPr lang="es-CO"/>
+          </a:p>
+        </p:txBody>
       </p:sp>
       <p:sp>
         <p:nvSpPr>
@@ -14016,6 +15109,13 @@
           </a:solidFill>
           <a:ln/>
         </p:spPr>
+        <p:txBody>
+          <a:bodyPr/>
+          <a:lstStyle/>
+          <a:p>
+            <a:endParaRPr lang="es-CO"/>
+          </a:p>
+        </p:txBody>
       </p:sp>
       <p:sp>
         <p:nvSpPr>
@@ -14135,6 +15235,13 @@
             </a:outerShdw>
           </a:effectLst>
         </p:spPr>
+        <p:txBody>
+          <a:bodyPr/>
+          <a:lstStyle/>
+          <a:p>
+            <a:endParaRPr lang="es-CO"/>
+          </a:p>
+        </p:txBody>
       </p:sp>
       <p:sp>
         <p:nvSpPr>
@@ -14155,6 +15262,13 @@
           </a:solidFill>
           <a:ln/>
         </p:spPr>
+        <p:txBody>
+          <a:bodyPr/>
+          <a:lstStyle/>
+          <a:p>
+            <a:endParaRPr lang="es-CO"/>
+          </a:p>
+        </p:txBody>
       </p:sp>
       <p:sp>
         <p:nvSpPr>
@@ -14274,6 +15388,13 @@
             </a:outerShdw>
           </a:effectLst>
         </p:spPr>
+        <p:txBody>
+          <a:bodyPr/>
+          <a:lstStyle/>
+          <a:p>
+            <a:endParaRPr lang="es-CO"/>
+          </a:p>
+        </p:txBody>
       </p:sp>
       <p:sp>
         <p:nvSpPr>
@@ -14294,6 +15415,13 @@
           </a:solidFill>
           <a:ln/>
         </p:spPr>
+        <p:txBody>
+          <a:bodyPr/>
+          <a:lstStyle/>
+          <a:p>
+            <a:endParaRPr lang="es-CO"/>
+          </a:p>
+        </p:txBody>
       </p:sp>
       <p:sp>
         <p:nvSpPr>
@@ -14413,6 +15541,13 @@
             </a:outerShdw>
           </a:effectLst>
         </p:spPr>
+        <p:txBody>
+          <a:bodyPr/>
+          <a:lstStyle/>
+          <a:p>
+            <a:endParaRPr lang="es-CO"/>
+          </a:p>
+        </p:txBody>
       </p:sp>
       <p:sp>
         <p:nvSpPr>
@@ -14433,6 +15568,13 @@
           </a:solidFill>
           <a:ln/>
         </p:spPr>
+        <p:txBody>
+          <a:bodyPr/>
+          <a:lstStyle/>
+          <a:p>
+            <a:endParaRPr lang="es-CO"/>
+          </a:p>
+        </p:txBody>
       </p:sp>
       <p:sp>
         <p:nvSpPr>
@@ -14552,6 +15694,13 @@
             </a:outerShdw>
           </a:effectLst>
         </p:spPr>
+        <p:txBody>
+          <a:bodyPr/>
+          <a:lstStyle/>
+          <a:p>
+            <a:endParaRPr lang="es-CO"/>
+          </a:p>
+        </p:txBody>
       </p:sp>
       <p:sp>
         <p:nvSpPr>
@@ -14572,6 +15721,13 @@
           </a:solidFill>
           <a:ln/>
         </p:spPr>
+        <p:txBody>
+          <a:bodyPr/>
+          <a:lstStyle/>
+          <a:p>
+            <a:endParaRPr lang="es-CO"/>
+          </a:p>
+        </p:txBody>
       </p:sp>
       <p:pic>
         <p:nvPicPr>
